--- a/social/regenerative-2026-10-15/single-2/regenerative-single-2-canva.pptx
+++ b/social/regenerative-2026-10-15/single-2/regenerative-single-2-canva.pptx
@@ -3128,8 +3128,8 @@
         </p:blipFill>
         <p:spPr>
           <a:xfrm>
-            <a:off x="7476067" y="338667"/>
-            <a:ext cx="1058333" cy="1058333"/>
+            <a:off x="7264400" y="474133"/>
+            <a:ext cx="1270000" cy="1270000"/>
           </a:xfrm>
           <a:prstGeom prst="rect">
             <a:avLst/>
@@ -3138,7 +3138,7 @@
       </p:pic>
       <p:pic>
         <p:nvPicPr>
-          <p:cNvPr id="4" name="rule-1" descr="s1-06-rule-1.png"/>
+          <p:cNvPr id="4" name="flower-poppy" descr="s1-05-flower-poppy.png"/>
           <p:cNvPicPr>
             <a:picLocks noChangeAspect="1"/>
           </p:cNvPicPr>
@@ -3152,8 +3152,8 @@
         </p:blipFill>
         <p:spPr>
           <a:xfrm>
-            <a:off x="609600" y="4758267"/>
-            <a:ext cx="7924800" cy="25400"/>
+            <a:off x="287867" y="7018867"/>
+            <a:ext cx="2294467" cy="4250267"/>
           </a:xfrm>
           <a:prstGeom prst="rect">
             <a:avLst/>
@@ -3162,31 +3162,7 @@
       </p:pic>
       <p:pic>
         <p:nvPicPr>
-          <p:cNvPr id="5" name="rule-2" descr="s1-06-rule-1.png"/>
-          <p:cNvPicPr>
-            <a:picLocks noChangeAspect="1"/>
-          </p:cNvPicPr>
-          <p:nvPr/>
-        </p:nvPicPr>
-        <p:blipFill>
-          <a:blip r:embed="rId4"/>
-          <a:stretch>
-            <a:fillRect/>
-          </a:stretch>
-        </p:blipFill>
-        <p:spPr>
-          <a:xfrm>
-            <a:off x="609600" y="5994400"/>
-            <a:ext cx="7924800" cy="25400"/>
-          </a:xfrm>
-          <a:prstGeom prst="rect">
-            <a:avLst/>
-          </a:prstGeom>
-        </p:spPr>
-      </p:pic>
-      <p:pic>
-        <p:nvPicPr>
-          <p:cNvPr id="6" name="flower-poppy" descr="s1-11-flower-poppy.png"/>
+          <p:cNvPr id="5" name="flower-marigold" descr="s1-06-flower-marigold.png"/>
           <p:cNvPicPr>
             <a:picLocks noChangeAspect="1"/>
           </p:cNvPicPr>
@@ -3200,8 +3176,8 @@
         </p:blipFill>
         <p:spPr>
           <a:xfrm>
-            <a:off x="5647267" y="8271933"/>
-            <a:ext cx="1574800" cy="2929467"/>
+            <a:off x="2387600" y="7772400"/>
+            <a:ext cx="2336800" cy="3589867"/>
           </a:xfrm>
           <a:prstGeom prst="rect">
             <a:avLst/>
@@ -3210,7 +3186,7 @@
       </p:pic>
       <p:pic>
         <p:nvPicPr>
-          <p:cNvPr id="7" name="flower-marigold" descr="s1-12-flower-marigold.png"/>
+          <p:cNvPr id="6" name="flower-paintbrush" descr="s1-07-flower-paintbrush.png"/>
           <p:cNvPicPr>
             <a:picLocks noChangeAspect="1"/>
           </p:cNvPicPr>
@@ -3224,8 +3200,8 @@
         </p:blipFill>
         <p:spPr>
           <a:xfrm>
-            <a:off x="4343400" y="9076267"/>
-            <a:ext cx="1642533" cy="2353733"/>
+            <a:off x="4360333" y="6697133"/>
+            <a:ext cx="2455333" cy="4555067"/>
           </a:xfrm>
           <a:prstGeom prst="rect">
             <a:avLst/>
@@ -3234,7 +3210,7 @@
       </p:pic>
       <p:pic>
         <p:nvPicPr>
-          <p:cNvPr id="8" name="flower-paintbrush" descr="s1-13-flower-paintbrush.png"/>
+          <p:cNvPr id="7" name="flower-heliconia" descr="s1-08-flower-heliconia.png"/>
           <p:cNvPicPr>
             <a:picLocks noChangeAspect="1"/>
           </p:cNvPicPr>
@@ -3248,48 +3224,24 @@
         </p:blipFill>
         <p:spPr>
           <a:xfrm>
-            <a:off x="6714067" y="7814733"/>
-            <a:ext cx="1811867" cy="3335867"/>
+            <a:off x="6426200" y="6485467"/>
+            <a:ext cx="2556933" cy="4944533"/>
           </a:xfrm>
           <a:prstGeom prst="rect">
             <a:avLst/>
           </a:prstGeom>
         </p:spPr>
       </p:pic>
-      <p:pic>
-        <p:nvPicPr>
-          <p:cNvPr id="9" name="flower-heliconia" descr="s1-14-flower-heliconia.png"/>
-          <p:cNvPicPr>
-            <a:picLocks noChangeAspect="1"/>
-          </p:cNvPicPr>
+      <p:sp>
+        <p:nvSpPr>
+          <p:cNvPr id="8" name="headline"/>
+          <p:cNvSpPr txBox="1"/>
           <p:nvPr/>
-        </p:nvPicPr>
-        <p:blipFill>
-          <a:blip r:embed="rId8"/>
-          <a:stretch>
-            <a:fillRect/>
-          </a:stretch>
-        </p:blipFill>
+        </p:nvSpPr>
         <p:spPr>
           <a:xfrm>
-            <a:off x="7586133" y="7704667"/>
-            <a:ext cx="1557867" cy="3725333"/>
-          </a:xfrm>
-          <a:prstGeom prst="rect">
-            <a:avLst/>
-          </a:prstGeom>
-        </p:spPr>
-      </p:pic>
-      <p:sp>
-        <p:nvSpPr>
-          <p:cNvPr id="10" name="headline"/>
-          <p:cNvSpPr txBox="1"/>
-          <p:nvPr/>
-        </p:nvSpPr>
-        <p:spPr>
-          <a:xfrm>
-            <a:off x="609600" y="1016000"/>
-            <a:ext cx="7924800" cy="2201333"/>
+            <a:off x="609600" y="1693333"/>
+            <a:ext cx="7924800" cy="2878667"/>
           </a:xfrm>
           <a:prstGeom prst="rect">
             <a:avLst/>
@@ -3304,11 +3256,11 @@
           <a:p>
             <a:pPr algn="l">
               <a:lnSpc>
-                <a:spcPct val="108000"/>
+                <a:spcPct val="104000"/>
               </a:lnSpc>
             </a:pPr>
             <a:r>
-              <a:rPr sz="5070" b="1">
+              <a:rPr sz="6930" b="1">
                 <a:solidFill>
                   <a:srgbClr val="F4F1EA"/>
                 </a:solidFill>
@@ -3321,14 +3273,14 @@
       </p:sp>
       <p:sp>
         <p:nvSpPr>
-          <p:cNvPr id="11" name="small-line"/>
+          <p:cNvPr id="9" name="small-line"/>
           <p:cNvSpPr txBox="1"/>
           <p:nvPr/>
         </p:nvSpPr>
         <p:spPr>
           <a:xfrm>
-            <a:off x="626533" y="3302000"/>
-            <a:ext cx="6773333" cy="474133"/>
+            <a:off x="643467" y="4741333"/>
+            <a:ext cx="7620000" cy="592667"/>
           </a:xfrm>
           <a:prstGeom prst="rect">
             <a:avLst/>
@@ -3347,196 +3299,13 @@
               </a:lnSpc>
             </a:pPr>
             <a:r>
-              <a:rPr sz="2930" b="1">
+              <a:rPr sz="3729" b="1">
                 <a:solidFill>
                   <a:srgbClr val="59A66C"/>
                 </a:solidFill>
                 <a:latin typeface="Source Sans Pro"/>
               </a:rPr>
               <a:t>And who gets to decide?</a:t>
-            </a:r>
-          </a:p>
-        </p:txBody>
-      </p:sp>
-      <p:sp>
-        <p:nvSpPr>
-          <p:cNvPr id="12" name="question-1"/>
-          <p:cNvSpPr txBox="1"/>
-          <p:nvPr/>
-        </p:nvSpPr>
-        <p:spPr>
-          <a:xfrm>
-            <a:off x="609600" y="4148667"/>
-            <a:ext cx="7924800" cy="474133"/>
-          </a:xfrm>
-          <a:prstGeom prst="rect">
-            <a:avLst/>
-          </a:prstGeom>
-          <a:noFill/>
-        </p:spPr>
-        <p:txBody>
-          <a:bodyPr wrap="square" lIns="0" rIns="0" tIns="0" bIns="0">
-            <a:spAutoFit/>
-          </a:bodyPr>
-          <a:lstStyle/>
-          <a:p>
-            <a:pPr algn="l">
-              <a:lnSpc>
-                <a:spcPct val="112000"/>
-              </a:lnSpc>
-            </a:pPr>
-            <a:r>
-              <a:rPr sz="3329" b="1">
-                <a:solidFill>
-                  <a:srgbClr val="F4F1EA"/>
-                </a:solidFill>
-                <a:latin typeface="Montserrat"/>
-              </a:rPr>
-              <a:t>A destination </a:t>
-            </a:r>
-            <a:r>
-              <a:rPr sz="3329" b="1">
-                <a:solidFill>
-                  <a:srgbClr val="59A66C"/>
-                </a:solidFill>
-                <a:latin typeface="Montserrat"/>
-              </a:rPr>
-              <a:t>or a direction?</a:t>
-            </a:r>
-          </a:p>
-        </p:txBody>
-      </p:sp>
-      <p:sp>
-        <p:nvSpPr>
-          <p:cNvPr id="13" name="question-2"/>
-          <p:cNvSpPr txBox="1"/>
-          <p:nvPr/>
-        </p:nvSpPr>
-        <p:spPr>
-          <a:xfrm>
-            <a:off x="609600" y="4910667"/>
-            <a:ext cx="7924800" cy="948267"/>
-          </a:xfrm>
-          <a:prstGeom prst="rect">
-            <a:avLst/>
-          </a:prstGeom>
-          <a:noFill/>
-        </p:spPr>
-        <p:txBody>
-          <a:bodyPr wrap="square" lIns="0" rIns="0" tIns="0" bIns="0">
-            <a:spAutoFit/>
-          </a:bodyPr>
-          <a:lstStyle/>
-          <a:p>
-            <a:pPr algn="l">
-              <a:lnSpc>
-                <a:spcPct val="112000"/>
-              </a:lnSpc>
-            </a:pPr>
-            <a:r>
-              <a:rPr sz="3329" b="1">
-                <a:solidFill>
-                  <a:srgbClr val="F4F1EA"/>
-                </a:solidFill>
-                <a:latin typeface="Montserrat"/>
-              </a:rPr>
-              <a:t>A certified status </a:t>
-            </a:r>
-            <a:r>
-              <a:rPr sz="3329" b="1">
-                <a:solidFill>
-                  <a:srgbClr val="59A66C"/>
-                </a:solidFill>
-                <a:latin typeface="Montserrat"/>
-              </a:rPr>
-              <a:t>or a way of thinking?</a:t>
-            </a:r>
-          </a:p>
-        </p:txBody>
-      </p:sp>
-      <p:sp>
-        <p:nvSpPr>
-          <p:cNvPr id="14" name="question-3"/>
-          <p:cNvSpPr txBox="1"/>
-          <p:nvPr/>
-        </p:nvSpPr>
-        <p:spPr>
-          <a:xfrm>
-            <a:off x="609600" y="6146800"/>
-            <a:ext cx="7924800" cy="1422400"/>
-          </a:xfrm>
-          <a:prstGeom prst="rect">
-            <a:avLst/>
-          </a:prstGeom>
-          <a:noFill/>
-        </p:spPr>
-        <p:txBody>
-          <a:bodyPr wrap="square" lIns="0" rIns="0" tIns="0" bIns="0">
-            <a:spAutoFit/>
-          </a:bodyPr>
-          <a:lstStyle/>
-          <a:p>
-            <a:pPr algn="l">
-              <a:lnSpc>
-                <a:spcPct val="112000"/>
-              </a:lnSpc>
-            </a:pPr>
-            <a:r>
-              <a:rPr sz="3329" b="1">
-                <a:solidFill>
-                  <a:srgbClr val="F4F1EA"/>
-                </a:solidFill>
-                <a:latin typeface="Montserrat"/>
-              </a:rPr>
-              <a:t>A premium product, </a:t>
-            </a:r>
-            <a:r>
-              <a:rPr sz="3329" b="1">
-                <a:solidFill>
-                  <a:srgbClr val="59A66C"/>
-                </a:solidFill>
-                <a:latin typeface="Montserrat"/>
-              </a:rPr>
-              <a:t>or a standard everyone who works the land can reach?</a:t>
-            </a:r>
-          </a:p>
-        </p:txBody>
-      </p:sp>
-      <p:sp>
-        <p:nvSpPr>
-          <p:cNvPr id="15" name="cta"/>
-          <p:cNvSpPr txBox="1"/>
-          <p:nvPr/>
-        </p:nvSpPr>
-        <p:spPr>
-          <a:xfrm>
-            <a:off x="626533" y="7907867"/>
-            <a:ext cx="4402667" cy="931333"/>
-          </a:xfrm>
-          <a:prstGeom prst="rect">
-            <a:avLst/>
-          </a:prstGeom>
-          <a:noFill/>
-        </p:spPr>
-        <p:txBody>
-          <a:bodyPr wrap="square" lIns="0" rIns="0" tIns="0" bIns="0">
-            <a:spAutoFit/>
-          </a:bodyPr>
-          <a:lstStyle/>
-          <a:p>
-            <a:pPr algn="l">
-              <a:lnSpc>
-                <a:spcPct val="125000"/>
-              </a:lnSpc>
-            </a:pPr>
-            <a:r>
-              <a:rPr sz="2530" b="1">
-                <a:solidFill>
-                  <a:srgbClr val="F4F1EA"/>
-                </a:solidFill>
-                <a:latin typeface="Source Sans Pro"/>
-              </a:rPr>
-              <a:t>What does regenerative mean to you? Tell us in the comments.</a:t>
             </a:r>
           </a:p>
         </p:txBody>
